--- a/output/시장재건축_상가소유주_주택분양방안_검증보고서_4x3.pptx
+++ b/output/시장재건축_상가소유주_주택분양방안_검증보고서_4x3.pptx
@@ -121,29 +121,29 @@
   <p:extLst>
     <p:ext uri="{521415D9-36F7-43E2-AB2F-B90AF26B5E84}">
       <p14:sectionLst xmlns:p14="http://schemas.microsoft.com/office/powerpoint/2010/main">
-        <p14:section name="표지" id="{028d386b-390e-9545-460f-73d8438503c4}">
+        <p14:section name="표지" id="{b6159c29-0347-ba79-1ee7-e4ca9760331a}">
           <p14:sldIdLst>
             <p14:sldId id="256"/>
           </p14:sldIdLst>
         </p14:section>
-        <p14:section name="목차" id="{f162e404-18a6-a2e1-c97c-fb393b192b9a}">
+        <p14:section name="목차" id="{d9561c7c-3c03-8290-9700-191f942e587f}">
           <p14:sldIdLst>
             <p14:sldId id="257"/>
           </p14:sldIdLst>
         </p14:section>
-        <p14:section name="Ⅰ. 검토 개요" id="{93e6aa1f-88bf-0a59-4c69-2ee8e0d4b8ad}">
+        <p14:section name="Ⅰ. 검토 개요" id="{0fd35629-e53f-65ba-901c-ae158670ad43}">
           <p14:sldIdLst>
             <p14:sldId id="258"/>
             <p14:sldId id="259"/>
           </p14:sldIdLst>
         </p14:section>
-        <p14:section name="Ⅱ. 가설 검증" id="{917b2876-108d-5267-7542-306b4468ac9f}">
+        <p14:section name="Ⅱ. 쟁점 검토" id="{8f7ade21-574d-4047-2ab3-0dd950151313}">
           <p14:sldIdLst>
             <p14:sldId id="260"/>
             <p14:sldId id="261"/>
           </p14:sldIdLst>
         </p14:section>
-        <p14:section name="Ⅲ. 대안 검토" id="{a8897d68-0e81-e090-a678-6d27fb114bc9}">
+        <p14:section name="Ⅲ. 대안 검토" id="{3f7c7bfe-ec66-85de-416a-9a3c0bcbe6e8}">
           <p14:sldIdLst>
             <p14:sldId id="262"/>
             <p14:sldId id="263"/>
@@ -152,14 +152,14 @@
             <p14:sldId id="266"/>
           </p14:sldIdLst>
         </p14:section>
-        <p14:section name="Ⅳ. 종합 및 후속 조치" id="{62a06f57-80f8-610b-7ea5-1f44dce7e8a3}">
+        <p14:section name="Ⅳ. 종합 및 후속 조치" id="{05866671-ede1-0b9c-144c-f732d3155847}">
           <p14:sldIdLst>
             <p14:sldId id="267"/>
             <p14:sldId id="268"/>
             <p14:sldId id="269"/>
           </p14:sldIdLst>
         </p14:section>
-        <p14:section name="붙임" id="{7d4c724e-d3f6-31b1-09d6-f420a44580fb}">
+        <p14:section name="붙임" id="{f4931a61-6444-19fa-f6f0-92a4d952fd0c}">
           <p14:sldIdLst>
             <p14:sldId id="270"/>
           </p14:sldIdLst>
@@ -2789,7 +2789,7 @@
                 <a:ea typeface="맑은 고딕" pitchFamily="34" charset="-122"/>
                 <a:cs typeface="맑은 고딕" pitchFamily="34" charset="-120"/>
               </a:rPr>
-              <a:t>검토 자료: 통화 녹취록(2026.10.19), 기 작성 검토 문서(docx)</a:t>
+              <a:t>검토 근거: 관계 법령, 법제처 법령해석례, 국토교통부·지자체 공개자료</a:t>
             </a:r>
             <a:endParaRPr lang="en-US" sz="1400" dirty="0"/>
           </a:p>
@@ -7818,7 +7818,7 @@
                 <a:ea typeface="맑은 고딕" pitchFamily="34" charset="-122"/>
                 <a:cs typeface="맑은 고딕" pitchFamily="34" charset="-120"/>
               </a:rPr>
-              <a:t>첨부 검토 문서(docx) 검증 결과</a:t>
+              <a:t>기존 검토안 검증 결과</a:t>
             </a:r>
             <a:endParaRPr lang="en-US" sz="2400" dirty="0"/>
           </a:p>
@@ -7988,7 +7988,7 @@
                           <a:ea typeface="맑은 고딕" pitchFamily="34" charset="-122"/>
                           <a:cs typeface="맑은 고딕" pitchFamily="34" charset="-120"/>
                         </a:rPr>
-                        <a:t>문서 기재 내용</a:t>
+                        <a:t>기존 검토안 기재 내용</a:t>
                       </a:r>
                       <a:endParaRPr lang="en-US" sz="1200" dirty="0">
                         <a:latin typeface="맑은 고딕" charset="0"/>
@@ -12133,7 +12133,7 @@
                 <a:ea typeface="맑은 고딕" pitchFamily="34" charset="-122"/>
                 <a:cs typeface="맑은 고딕" pitchFamily="34" charset="-120"/>
               </a:rPr>
-              <a:t>결론 요약 · 통화 내용 핵심 쟁점</a:t>
+              <a:t>결론 요약 · 사업 현황 및 검토 쟁점</a:t>
             </a:r>
             <a:endParaRPr lang="en-US" sz="1300" dirty="0"/>
           </a:p>
@@ -12261,7 +12261,7 @@
                 <a:ea typeface="맑은 고딕" pitchFamily="34" charset="-122"/>
                 <a:cs typeface="맑은 고딕" pitchFamily="34" charset="-120"/>
               </a:rPr>
-              <a:t>가설 검증</a:t>
+              <a:t>쟁점 검토</a:t>
             </a:r>
             <a:endParaRPr lang="en-US" sz="1700" dirty="0"/>
           </a:p>
@@ -12300,7 +12300,7 @@
                 <a:ea typeface="맑은 고딕" pitchFamily="34" charset="-122"/>
                 <a:cs typeface="맑은 고딕" pitchFamily="34" charset="-120"/>
               </a:rPr>
-              <a:t>300세대 미만 건축허가 예외론 · 지자체 특별공급 배정론</a:t>
+              <a:t>건축허가 시 공급규칙 적용 여부 · 특별공급 물량 배정 가능 여부</a:t>
             </a:r>
             <a:endParaRPr lang="en-US" sz="1300" dirty="0"/>
           </a:p>
@@ -12634,7 +12634,7 @@
                 <a:ea typeface="맑은 고딕" pitchFamily="34" charset="-122"/>
                 <a:cs typeface="맑은 고딕" pitchFamily="34" charset="-120"/>
               </a:rPr>
-              <a:t>방식별 비교 · 첨부 문서 검증 · 실무 확인 사항</a:t>
+              <a:t>방식별 비교 · 기존 검토안 검증 · 실무 확인 사항</a:t>
             </a:r>
             <a:endParaRPr lang="en-US" sz="1300" dirty="0"/>
           </a:p>
@@ -13320,7 +13320,7 @@
                 <a:ea typeface="맑은 고딕" pitchFamily="34" charset="-122"/>
                 <a:cs typeface="맑은 고딕" pitchFamily="34" charset="-120"/>
               </a:rPr>
-              <a:t>가설 ①</a:t>
+              <a:t>쟁점 ①</a:t>
             </a:r>
             <a:endParaRPr lang="en-US" sz="1200" dirty="0"/>
           </a:p>
@@ -13528,7 +13528,7 @@
                 <a:ea typeface="맑은 고딕" pitchFamily="34" charset="-122"/>
                 <a:cs typeface="맑은 고딕" pitchFamily="34" charset="-120"/>
               </a:rPr>
-              <a:t>가설 ②</a:t>
+              <a:t>쟁점 ②</a:t>
             </a:r>
             <a:endParaRPr lang="en-US" sz="1200" dirty="0"/>
           </a:p>
@@ -13567,7 +13567,7 @@
                 <a:ea typeface="맑은 고딕" pitchFamily="34" charset="-122"/>
                 <a:cs typeface="맑은 고딕" pitchFamily="34" charset="-120"/>
               </a:rPr>
-              <a:t>지자체 특별공급(5%) 배정</a:t>
+              <a:t>지자체 특별공급 물량 배정</a:t>
             </a:r>
             <a:endParaRPr lang="en-US" sz="1300" dirty="0"/>
           </a:p>
@@ -14659,7 +14659,7 @@
                 <a:ea typeface="맑은 고딕" pitchFamily="34" charset="-122"/>
                 <a:cs typeface="맑은 고딕" pitchFamily="34" charset="-120"/>
               </a:rPr>
-              <a:t>통화 내용 핵심 쟁점</a:t>
+              <a:t>사업 현황 및 검토 쟁점</a:t>
             </a:r>
             <a:endParaRPr lang="en-US" sz="2400" dirty="0"/>
           </a:p>
@@ -14700,7 +14700,7 @@
                 <a:ea typeface="맑은 고딕" pitchFamily="34" charset="-122"/>
                 <a:cs typeface="맑은 고딕" pitchFamily="34" charset="-120"/>
               </a:rPr>
-              <a:t>출처: 통화 녹취록(2026.10.19, 3분 36초)</a:t>
+              <a:t>출처: 관계 법령 및 법제처 법령해석례</a:t>
             </a:r>
             <a:endParaRPr lang="en-US" sz="900" dirty="0"/>
           </a:p>
@@ -14778,7 +14778,7 @@
                 <a:ea typeface="맑은 고딕" pitchFamily="34" charset="-122"/>
                 <a:cs typeface="맑은 고딕" pitchFamily="34" charset="-120"/>
               </a:rPr>
-              <a:t>상가주 아파트 수분양 요구에 대해 통화 당사자 모두 선례를 확인하지 못함.</a:t>
+              <a:t>상가 소유주의 아파트 분양 요구에 대한 법적 허용 경로를 검토함.</a:t>
             </a:r>
             <a:endParaRPr lang="en-US" sz="1400" dirty="0"/>
           </a:p>
@@ -14947,7 +14947,7 @@
                 <a:ea typeface="맑은 고딕" pitchFamily="34" charset="-122"/>
                 <a:cs typeface="맑은 고딕" pitchFamily="34" charset="-120"/>
               </a:rPr>
-              <a:t>광명시 상가 재건축 PM. 상가를 주상복합으로 개발함.</a:t>
+              <a:t>광명시 소재 상가 재건축 사업. 상가를 주상복합으로 개발함.</a:t>
             </a:r>
             <a:endParaRPr lang="en-US" sz="1250" dirty="0"/>
           </a:p>
@@ -15077,7 +15077,7 @@
                 <a:ea typeface="맑은 고딕" pitchFamily="34" charset="-122"/>
                 <a:cs typeface="맑은 고딕" pitchFamily="34" charset="-120"/>
               </a:rPr>
-              <a:t>핵심 니즈</a:t>
+              <a:t>핵심 요구</a:t>
             </a:r>
             <a:endParaRPr lang="en-US" sz="1500" dirty="0"/>
           </a:p>
@@ -15415,7 +15415,7 @@
                 <a:ea typeface="맑은 고딕" pitchFamily="34" charset="-122"/>
                 <a:cs typeface="맑은 고딕" pitchFamily="34" charset="-120"/>
               </a:rPr>
-              <a:t>외부 문의</a:t>
+              <a:t>검토 쟁점</a:t>
             </a:r>
             <a:endParaRPr lang="en-US" sz="1500" dirty="0"/>
           </a:p>
@@ -15454,7 +15454,7 @@
                 <a:ea typeface="맑은 고딕" pitchFamily="34" charset="-122"/>
                 <a:cs typeface="맑은 고딕" pitchFamily="34" charset="-120"/>
               </a:rPr>
-              <a:t>지자체 특별공급 물량 중 5% 이내 배정 가능 의견을 들음.</a:t>
+              <a:t>지자체 특별공급 물량을 상가 소유주에게 배정할 수 있는지 여부.</a:t>
             </a:r>
             <a:endParaRPr lang="en-US" sz="1250" dirty="0"/>
           </a:p>
@@ -15462,7 +15462,7 @@
       </p:sp>
       <p:sp>
         <p:nvSpPr>
-          <p:cNvPr id="27" name="voice"/>
+          <p:cNvPr id="27" name="criteria"/>
           <p:cNvSpPr/>
           <p:nvPr/>
         </p:nvSpPr>
@@ -15520,7 +15520,7 @@
                 <a:ea typeface="맑은 고딕" pitchFamily="34" charset="-122"/>
                 <a:cs typeface="맑은 고딕" pitchFamily="34" charset="-120"/>
               </a:rPr>
-              <a:t>통화 상대방 의견(녹취 기준)</a:t>
+              <a:t>검토 기준 및 방법</a:t>
             </a:r>
             <a:endParaRPr lang="en-US" sz="1300" dirty="0"/>
           </a:p>
@@ -15563,7 +15563,7 @@
                 <a:ea typeface="맑은 고딕" pitchFamily="34" charset="-122"/>
                 <a:cs typeface="맑은 고딕" pitchFamily="34" charset="-120"/>
               </a:rPr>
-              <a:t>공급규칙상 상가 소유주 아파트 배정은 불가하다는 견해임.</a:t>
+              <a:t>관계 법령: 주택법, 주택공급에 관한 규칙, 전통시장법, 도시정비법, 소규모주택정비법, 건축물분양법.</a:t>
             </a:r>
             <a:endParaRPr lang="en-US" sz="1250" dirty="0"/>
           </a:p>
@@ -15584,7 +15584,7 @@
                 <a:ea typeface="맑은 고딕" pitchFamily="34" charset="-122"/>
                 <a:cs typeface="맑은 고딕" pitchFamily="34" charset="-120"/>
               </a:rPr>
-              <a:t>지자체 특별공급 물량은 통상 임대 목적임. 매입 재원 부족 시 일반분양 전환 사례 언급함(부산 화명동, 미검증).</a:t>
+              <a:t>유권해석: 법제처 법령해석례 및 국토교통부 정책 질의회신.</a:t>
             </a:r>
             <a:endParaRPr lang="en-US" sz="1250" dirty="0"/>
           </a:p>
@@ -15605,7 +15605,7 @@
                 <a:ea typeface="맑은 고딕" pitchFamily="34" charset="-122"/>
                 <a:cs typeface="맑은 고딕" pitchFamily="34" charset="-120"/>
               </a:rPr>
-              <a:t>물량 사전 배정 방식은 본 적이 없다는 의견임. 공급규칙 특례 전수 검토에 공감함.</a:t>
+              <a:t>법령상 공급 예외 경로 해당 여부를 사업 방식별로 비교 검토함.</a:t>
             </a:r>
             <a:endParaRPr lang="en-US" sz="1250" dirty="0"/>
           </a:p>
@@ -15719,7 +15719,7 @@
                 <a:ea typeface="맑은 고딕" pitchFamily="34" charset="-122"/>
                 <a:cs typeface="맑은 고딕" pitchFamily="34" charset="-120"/>
               </a:rPr>
-              <a:t>Ⅱ. 가설 검증</a:t>
+              <a:t>Ⅱ. 쟁점 검토</a:t>
             </a:r>
             <a:endParaRPr lang="en-US" sz="1100" dirty="0"/>
           </a:p>
@@ -15760,7 +15760,7 @@
                 <a:ea typeface="맑은 고딕" pitchFamily="34" charset="-122"/>
                 <a:cs typeface="맑은 고딕" pitchFamily="34" charset="-120"/>
               </a:rPr>
-              <a:t>가설 ① 300세대 미만 건축허가 예외론</a:t>
+              <a:t>쟁점 ① 건축허가 시 공급규칙 적용 여부</a:t>
             </a:r>
             <a:endParaRPr lang="en-US" sz="2400" dirty="0"/>
           </a:p>
@@ -16624,7 +16624,7 @@
                 <a:ea typeface="맑은 고딕" pitchFamily="34" charset="-122"/>
                 <a:cs typeface="맑은 고딕" pitchFamily="34" charset="-120"/>
               </a:rPr>
-              <a:t>Ⅱ. 가설 검증</a:t>
+              <a:t>Ⅱ. 쟁점 검토</a:t>
             </a:r>
             <a:endParaRPr lang="en-US" sz="1100" dirty="0"/>
           </a:p>
@@ -16665,7 +16665,7 @@
                 <a:ea typeface="맑은 고딕" pitchFamily="34" charset="-122"/>
                 <a:cs typeface="맑은 고딕" pitchFamily="34" charset="-120"/>
               </a:rPr>
-              <a:t>가설 ② 지자체 특별공급 물량 배정론</a:t>
+              <a:t>쟁점 ② 특별공급 물량 배정 가능 여부</a:t>
             </a:r>
             <a:endParaRPr lang="en-US" sz="2400" dirty="0"/>
           </a:p>
